--- a/workshop-1-setup.pptx
+++ b/workshop-1-setup.pptx
@@ -16,9 +16,10 @@
     <p:sldId id="275" r:id="rId10"/>
     <p:sldId id="276" r:id="rId11"/>
     <p:sldId id="278" r:id="rId12"/>
-    <p:sldId id="277" r:id="rId13"/>
+    <p:sldId id="280" r:id="rId13"/>
     <p:sldId id="279" r:id="rId14"/>
-    <p:sldId id="265" r:id="rId15"/>
+    <p:sldId id="281" r:id="rId15"/>
+    <p:sldId id="265" r:id="rId16"/>
   </p:sldIdLst>
   <p:sldSz cx="12192000" cy="6858000"/>
   <p:notesSz cx="6858000" cy="9144000"/>
@@ -3803,7 +3804,18 @@
                 </a:solidFill>
                 <a:latin typeface="Menlo" panose="020B0609030804020204" pitchFamily="49" charset="0"/>
               </a:rPr>
-              <a:t>echo ‘export PATH=$HOME/FAIR/miniconda3/bin:$PATH’ &gt;&gt; $HOME/.</a:t>
+              <a:t>export PATH=$HOME/FAIR/miniconda3/bin:$PATH</a:t>
+            </a:r>
+          </a:p>
+          <a:p>
+            <a:r>
+              <a:rPr lang="en-US" sz="1600" dirty="0">
+                <a:solidFill>
+                  <a:srgbClr val="000000"/>
+                </a:solidFill>
+                <a:latin typeface="Menlo" panose="020B0609030804020204" pitchFamily="49" charset="0"/>
+              </a:rPr>
+              <a:t># you can run ‘</a:t>
             </a:r>
             <a:r>
               <a:rPr lang="en-US" sz="1600" dirty="0" err="1">
@@ -3812,16 +3824,62 @@
                 </a:solidFill>
                 <a:latin typeface="Menlo" panose="020B0609030804020204" pitchFamily="49" charset="0"/>
               </a:rPr>
+              <a:t>conda</a:t>
+            </a:r>
+            <a:r>
+              <a:rPr lang="en-US" sz="1600" dirty="0">
+                <a:solidFill>
+                  <a:srgbClr val="000000"/>
+                </a:solidFill>
+                <a:latin typeface="Menlo" panose="020B0609030804020204" pitchFamily="49" charset="0"/>
+              </a:rPr>
+              <a:t> </a:t>
+            </a:r>
+            <a:r>
+              <a:rPr lang="en-US" sz="1600" dirty="0" err="1">
+                <a:solidFill>
+                  <a:srgbClr val="000000"/>
+                </a:solidFill>
+                <a:latin typeface="Menlo" panose="020B0609030804020204" pitchFamily="49" charset="0"/>
+              </a:rPr>
+              <a:t>init</a:t>
+            </a:r>
+            <a:r>
+              <a:rPr lang="en-US" sz="1600" dirty="0">
+                <a:solidFill>
+                  <a:srgbClr val="000000"/>
+                </a:solidFill>
+                <a:latin typeface="Menlo" panose="020B0609030804020204" pitchFamily="49" charset="0"/>
+              </a:rPr>
+              <a:t>’ to initialize </a:t>
+            </a:r>
+            <a:r>
+              <a:rPr lang="en-US" sz="1600" dirty="0" err="1">
+                <a:solidFill>
+                  <a:srgbClr val="000000"/>
+                </a:solidFill>
+                <a:latin typeface="Menlo" panose="020B0609030804020204" pitchFamily="49" charset="0"/>
+              </a:rPr>
+              <a:t>conda</a:t>
+            </a:r>
+            <a:r>
+              <a:rPr lang="en-US" sz="1600" dirty="0">
+                <a:solidFill>
+                  <a:srgbClr val="000000"/>
+                </a:solidFill>
+                <a:latin typeface="Menlo" panose="020B0609030804020204" pitchFamily="49" charset="0"/>
+              </a:rPr>
+              <a:t> in .</a:t>
+            </a:r>
+            <a:r>
+              <a:rPr lang="en-US" sz="1600" dirty="0" err="1">
+                <a:solidFill>
+                  <a:srgbClr val="000000"/>
+                </a:solidFill>
+                <a:latin typeface="Menlo" panose="020B0609030804020204" pitchFamily="49" charset="0"/>
+              </a:rPr>
               <a:t>bashrc</a:t>
             </a:r>
-            <a:endParaRPr lang="en-US" sz="1600" dirty="0">
-              <a:solidFill>
-                <a:srgbClr val="000000"/>
-              </a:solidFill>
-              <a:latin typeface="Menlo" panose="020B0609030804020204" pitchFamily="49" charset="0"/>
-            </a:endParaRPr>
-          </a:p>
-          <a:p>
             <a:r>
               <a:rPr lang="en-US" sz="1600" dirty="0">
                 <a:solidFill>
@@ -3829,23 +3887,8 @@
                 </a:solidFill>
                 <a:latin typeface="Menlo" panose="020B0609030804020204" pitchFamily="49" charset="0"/>
               </a:rPr>
-              <a:t>source $HOME/.</a:t>
-            </a:r>
-            <a:r>
-              <a:rPr lang="en-US" sz="1600" dirty="0" err="1">
-                <a:solidFill>
-                  <a:srgbClr val="000000"/>
-                </a:solidFill>
-                <a:latin typeface="Menlo" panose="020B0609030804020204" pitchFamily="49" charset="0"/>
-              </a:rPr>
-              <a:t>bashrc</a:t>
-            </a:r>
-            <a:endParaRPr lang="en-US" sz="1600" dirty="0">
-              <a:solidFill>
-                <a:srgbClr val="000000"/>
-              </a:solidFill>
-              <a:latin typeface="Menlo" panose="020B0609030804020204" pitchFamily="49" charset="0"/>
-            </a:endParaRPr>
+              <a:t>. </a:t>
+            </a:r>
           </a:p>
           <a:p>
             <a:r>
@@ -4251,7 +4294,7 @@
           <p:cNvPr id="2" name="Title 1">
             <a:extLst>
               <a:ext uri="{FF2B5EF4-FFF2-40B4-BE49-F238E27FC236}">
-                <a16:creationId xmlns:a16="http://schemas.microsoft.com/office/drawing/2014/main" id="{56E6CFD5-A6CC-1604-AC10-3AADD355F6E6}"/>
+                <a16:creationId xmlns:a16="http://schemas.microsoft.com/office/drawing/2014/main" id="{23D7AFB3-B07E-D993-7CB7-12F866BB4E51}"/>
               </a:ext>
             </a:extLst>
           </p:cNvPr>
@@ -4268,12 +4311,8 @@
           <a:lstStyle/>
           <a:p>
             <a:r>
-              <a:rPr lang="en-US" dirty="0"/>
-              <a:t>Google </a:t>
-            </a:r>
-            <a:r>
               <a:rPr lang="en-US" dirty="0" err="1"/>
-              <a:t>Colab</a:t>
+              <a:t>Jupyter</a:t>
             </a:r>
             <a:endParaRPr lang="en-US" dirty="0"/>
           </a:p>
@@ -4284,7 +4323,7 @@
           <p:cNvPr id="4" name="Picture 3">
             <a:extLst>
               <a:ext uri="{FF2B5EF4-FFF2-40B4-BE49-F238E27FC236}">
-                <a16:creationId xmlns:a16="http://schemas.microsoft.com/office/drawing/2014/main" id="{75904C2A-397C-08DA-2454-859C0A663BFF}"/>
+                <a16:creationId xmlns:a16="http://schemas.microsoft.com/office/drawing/2014/main" id="{1726F9C1-B418-A63F-36F3-CB5D01C90485}"/>
               </a:ext>
             </a:extLst>
           </p:cNvPr>
@@ -4301,48 +4340,69 @@
         </p:blipFill>
         <p:spPr>
           <a:xfrm>
-            <a:off x="10018857" y="6311900"/>
-            <a:ext cx="2173143" cy="559352"/>
+            <a:off x="1997765" y="2798402"/>
+            <a:ext cx="6298096" cy="3443372"/>
           </a:xfrm>
           <a:prstGeom prst="rect">
             <a:avLst/>
           </a:prstGeom>
         </p:spPr>
       </p:pic>
-      <p:pic>
-        <p:nvPicPr>
-          <p:cNvPr id="5" name="Picture 4">
-            <a:extLst>
-              <a:ext uri="{FF2B5EF4-FFF2-40B4-BE49-F238E27FC236}">
-                <a16:creationId xmlns:a16="http://schemas.microsoft.com/office/drawing/2014/main" id="{D64CC7C7-2B49-431A-6B6E-43DD7FDBE367}"/>
-              </a:ext>
-            </a:extLst>
-          </p:cNvPr>
-          <p:cNvPicPr>
-            <a:picLocks noChangeAspect="1"/>
-          </p:cNvPicPr>
+      <p:sp>
+        <p:nvSpPr>
+          <p:cNvPr id="6" name="TextBox 5">
+            <a:extLst>
+              <a:ext uri="{FF2B5EF4-FFF2-40B4-BE49-F238E27FC236}">
+                <a16:creationId xmlns:a16="http://schemas.microsoft.com/office/drawing/2014/main" id="{EF62FAC0-E6C2-1245-C617-7CA53A4496DE}"/>
+              </a:ext>
+            </a:extLst>
+          </p:cNvPr>
+          <p:cNvSpPr txBox="1"/>
           <p:nvPr/>
-        </p:nvPicPr>
-        <p:blipFill>
-          <a:blip r:embed="rId3"/>
-          <a:stretch>
-            <a:fillRect/>
-          </a:stretch>
-        </p:blipFill>
+        </p:nvSpPr>
         <p:spPr>
           <a:xfrm>
-            <a:off x="1984512" y="1531763"/>
-            <a:ext cx="8691245" cy="4272689"/>
+            <a:off x="1417983" y="1875213"/>
+            <a:ext cx="6096000" cy="369332"/>
           </a:xfrm>
           <a:prstGeom prst="rect">
             <a:avLst/>
           </a:prstGeom>
+          <a:noFill/>
         </p:spPr>
-      </p:pic>
+        <p:txBody>
+          <a:bodyPr wrap="square">
+            <a:spAutoFit/>
+          </a:bodyPr>
+          <a:lstStyle/>
+          <a:p>
+            <a:r>
+              <a:rPr lang="en-US" dirty="0" err="1">
+                <a:solidFill>
+                  <a:srgbClr val="000000"/>
+                </a:solidFill>
+                <a:effectLst/>
+                <a:latin typeface="Menlo" panose="020B0609030804020204" pitchFamily="49" charset="0"/>
+              </a:rPr>
+              <a:t>jupyter</a:t>
+            </a:r>
+            <a:r>
+              <a:rPr lang="en-US" dirty="0">
+                <a:solidFill>
+                  <a:srgbClr val="000000"/>
+                </a:solidFill>
+                <a:effectLst/>
+                <a:latin typeface="Menlo" panose="020B0609030804020204" pitchFamily="49" charset="0"/>
+              </a:rPr>
+              <a:t> lab</a:t>
+            </a:r>
+          </a:p>
+        </p:txBody>
+      </p:sp>
     </p:spTree>
     <p:extLst>
       <p:ext uri="{BB962C8B-B14F-4D97-AF65-F5344CB8AC3E}">
-        <p14:creationId xmlns:p14="http://schemas.microsoft.com/office/powerpoint/2010/main" val="1462335722"/>
+        <p14:creationId xmlns:p14="http://schemas.microsoft.com/office/powerpoint/2010/main" val="663882968"/>
       </p:ext>
     </p:extLst>
   </p:cSld>
@@ -4724,6 +4784,129 @@
 </file>
 
 <file path=ppt/slides/slide14.xml><?xml version="1.0" encoding="utf-8"?>
+<p:sld xmlns:a="http://schemas.openxmlformats.org/drawingml/2006/main" xmlns:r="http://schemas.openxmlformats.org/officeDocument/2006/relationships" xmlns:p="http://schemas.openxmlformats.org/presentationml/2006/main">
+  <p:cSld>
+    <p:spTree>
+      <p:nvGrpSpPr>
+        <p:cNvPr id="1" name=""/>
+        <p:cNvGrpSpPr/>
+        <p:nvPr/>
+      </p:nvGrpSpPr>
+      <p:grpSpPr>
+        <a:xfrm>
+          <a:off x="0" y="0"/>
+          <a:ext cx="0" cy="0"/>
+          <a:chOff x="0" y="0"/>
+          <a:chExt cx="0" cy="0"/>
+        </a:xfrm>
+      </p:grpSpPr>
+      <p:sp>
+        <p:nvSpPr>
+          <p:cNvPr id="2" name="Title 1">
+            <a:extLst>
+              <a:ext uri="{FF2B5EF4-FFF2-40B4-BE49-F238E27FC236}">
+                <a16:creationId xmlns:a16="http://schemas.microsoft.com/office/drawing/2014/main" id="{0F5D3512-CA13-A56C-03DF-0FEE8A7853E4}"/>
+              </a:ext>
+            </a:extLst>
+          </p:cNvPr>
+          <p:cNvSpPr>
+            <a:spLocks noGrp="1"/>
+          </p:cNvSpPr>
+          <p:nvPr>
+            <p:ph type="title"/>
+          </p:nvPr>
+        </p:nvSpPr>
+        <p:spPr/>
+        <p:txBody>
+          <a:bodyPr/>
+          <a:lstStyle/>
+          <a:p>
+            <a:endParaRPr lang="en-US"/>
+          </a:p>
+        </p:txBody>
+      </p:sp>
+      <p:sp>
+        <p:nvSpPr>
+          <p:cNvPr id="3" name="Content Placeholder 2">
+            <a:extLst>
+              <a:ext uri="{FF2B5EF4-FFF2-40B4-BE49-F238E27FC236}">
+                <a16:creationId xmlns:a16="http://schemas.microsoft.com/office/drawing/2014/main" id="{D7CF0EAA-6ED0-351F-2C1D-41E71D185D59}"/>
+              </a:ext>
+            </a:extLst>
+          </p:cNvPr>
+          <p:cNvSpPr>
+            <a:spLocks noGrp="1"/>
+          </p:cNvSpPr>
+          <p:nvPr>
+            <p:ph idx="1"/>
+          </p:nvPr>
+        </p:nvSpPr>
+        <p:spPr/>
+        <p:txBody>
+          <a:bodyPr/>
+          <a:lstStyle/>
+          <a:p>
+            <a:endParaRPr lang="en-US"/>
+          </a:p>
+        </p:txBody>
+      </p:sp>
+      <p:sp>
+        <p:nvSpPr>
+          <p:cNvPr id="5" name="TextBox 4">
+            <a:extLst>
+              <a:ext uri="{FF2B5EF4-FFF2-40B4-BE49-F238E27FC236}">
+                <a16:creationId xmlns:a16="http://schemas.microsoft.com/office/drawing/2014/main" id="{E7CECE4F-3961-F12C-1EFF-DC6852FC0A5C}"/>
+              </a:ext>
+            </a:extLst>
+          </p:cNvPr>
+          <p:cNvSpPr txBox="1"/>
+          <p:nvPr/>
+        </p:nvSpPr>
+        <p:spPr>
+          <a:xfrm>
+            <a:off x="838199" y="3059668"/>
+            <a:ext cx="10651435" cy="1323439"/>
+          </a:xfrm>
+          <a:prstGeom prst="rect">
+            <a:avLst/>
+          </a:prstGeom>
+          <a:noFill/>
+        </p:spPr>
+        <p:txBody>
+          <a:bodyPr wrap="square">
+            <a:spAutoFit/>
+          </a:bodyPr>
+          <a:lstStyle/>
+          <a:p>
+            <a:r>
+              <a:rPr lang="en-US" sz="4000" dirty="0"/>
+              <a:t>https://</a:t>
+            </a:r>
+            <a:r>
+              <a:rPr lang="en-US" sz="4000" dirty="0" err="1"/>
+              <a:t>github.com</a:t>
+            </a:r>
+            <a:r>
+              <a:rPr lang="en-US" sz="4000" dirty="0"/>
+              <a:t>/Daniel-Gong/LLM-Workshop-Materials</a:t>
+            </a:r>
+          </a:p>
+        </p:txBody>
+      </p:sp>
+    </p:spTree>
+    <p:extLst>
+      <p:ext uri="{BB962C8B-B14F-4D97-AF65-F5344CB8AC3E}">
+        <p14:creationId xmlns:p14="http://schemas.microsoft.com/office/powerpoint/2010/main" val="481527859"/>
+      </p:ext>
+    </p:extLst>
+  </p:cSld>
+  <p:clrMapOvr>
+    <a:masterClrMapping/>
+  </p:clrMapOvr>
+</p:sld>
+</file>
+
+<file path=ppt/slides/slide15.xml><?xml version="1.0" encoding="utf-8"?>
 <p:sld xmlns:a="http://schemas.openxmlformats.org/drawingml/2006/main" xmlns:r="http://schemas.openxmlformats.org/officeDocument/2006/relationships" xmlns:p="http://schemas.openxmlformats.org/presentationml/2006/main">
   <p:cSld>
     <p:spTree>
@@ -6747,7 +6930,7 @@
             <a:pPr lvl="1"/>
             <a:r>
               <a:rPr lang="en-US" dirty="0"/>
-              <a:t>Virtual environment</a:t>
+              <a:t>Virtual environment for Python</a:t>
             </a:r>
           </a:p>
           <a:p>
@@ -6770,12 +6953,8 @@
           </a:p>
           <a:p>
             <a:r>
-              <a:rPr lang="en-US" dirty="0"/>
-              <a:t>Google </a:t>
-            </a:r>
-            <a:r>
               <a:rPr lang="en-US" dirty="0" err="1"/>
-              <a:t>Colab</a:t>
+              <a:t>Jupyter</a:t>
             </a:r>
             <a:endParaRPr lang="en-US" dirty="0"/>
           </a:p>
